--- a/dist/초2/국어/이야기와쓰기/초2_국어_이야기와쓰기_01_일이일어난차례.pptx
+++ b/dist/초2/국어/이야기와쓰기/초2_국어_이야기와쓰기_01_일이일어난차례.pptx
@@ -119,39 +119,39 @@
   <p:extLst>
     <p:ext uri="{521415D9-36F7-43E2-AB2F-B90AF26B5E84}">
       <p14:sectionLst xmlns:p14="http://schemas.microsoft.com/office/powerpoint/2010/main">
-        <p14:section name="도입" id="{03e659e6-c519-728a-172f-e9836e5ebafc}">
+        <p14:section name="도입" id="{a49caea9-14a3-f3bb-01f8-62adb1b51531}">
           <p14:sldIdLst>
             <p14:sldId id="256"/>
             <p14:sldId id="257"/>
           </p14:sldIdLst>
         </p14:section>
-        <p14:section name="개념" id="{1862629c-9281-a114-0026-c4793875be91}">
+        <p14:section name="개념" id="{42885b4a-c5da-54ce-b024-8d519d03a98e}">
           <p14:sldIdLst>
             <p14:sldId id="258"/>
             <p14:sldId id="259"/>
             <p14:sldId id="260"/>
           </p14:sldIdLst>
         </p14:section>
-        <p14:section name="연습" id="{9c071246-454d-c047-4a37-18965ee7911d}">
+        <p14:section name="연습" id="{f7d09b69-2a7a-4c88-dc4e-8ed898309a21}">
           <p14:sldIdLst>
             <p14:sldId id="261"/>
             <p14:sldId id="262"/>
             <p14:sldId id="263"/>
           </p14:sldIdLst>
         </p14:section>
-        <p14:section name="확인" id="{3a0432df-7856-5b42-0f4a-2cea4aa352bc}">
+        <p14:section name="확인" id="{a5ed00b7-171f-ad5a-de4e-ea3c555ec7d4}">
           <p14:sldIdLst>
             <p14:sldId id="264"/>
             <p14:sldId id="265"/>
             <p14:sldId id="266"/>
           </p14:sldIdLst>
         </p14:section>
-        <p14:section name="정리" id="{c6cb70c5-a602-d069-e3c5-ea245e97fb5e}">
+        <p14:section name="정리" id="{9d9fa166-26ca-d6ce-5ccd-57a4576bf7ae}">
           <p14:sldIdLst>
             <p14:sldId id="267"/>
           </p14:sldIdLst>
         </p14:section>
-        <p14:section name="보충" id="{5ea52377-749e-8b8b-e929-fd46e1836639}">
+        <p14:section name="보충" id="{ca204461-69a0-9552-d4f7-1422659f7da6}">
           <p14:sldIdLst>
             <p14:sldId id="268"/>
           </p14:sldIdLst>
@@ -568,6 +568,8 @@
 - “이야기에서도 일이 차례대로 일어나. 오늘은 그 차례를 찾고 말하는 방법을 배울 거야.”
 예상 답
 - “세수했어요. 그다음에 밥 먹었어요.”
+막히면
+- “세수하기와 아침 먹기 중에 무엇을 먼저 했어?”처럼 두 가지 중에서 고르게 합니다.
 주의
 - 차례가 조금 뒤섞여도 고치지 말고 들어 둡니다.</a:t>
             </a:r>
@@ -863,7 +865,9 @@
 예상 답
 - “처음에, 그다음에, 마지막에를 넣어서 차례대로 말해요.”
 정답
-- ① 처음에, 그다음에, 마지막에 ② 먹는 것보다 먼저 한다는 뜻 ③ 씨앗 심기 → 싹이 남 → 꽃이 핌</a:t>
+- ① 처음에, 그다음에, 마지막에 ② 먹는 것보다 먼저 한다는 뜻 ③ 씨앗 심기 → 싹이 남 → 꽃이 핌
+막히면
+- S03의 카드와 S05의 그림을 다시 보여 줍니다.</a:t>
             </a:r>
             <a:endParaRPr lang="en-US" dirty="0"/>
           </a:p>

--- a/dist/초2/국어/이야기와쓰기/초2_국어_이야기와쓰기_01_일이일어난차례.pptx
+++ b/dist/초2/국어/이야기와쓰기/초2_국어_이야기와쓰기_01_일이일어난차례.pptx
@@ -119,39 +119,39 @@
   <p:extLst>
     <p:ext uri="{521415D9-36F7-43E2-AB2F-B90AF26B5E84}">
       <p14:sectionLst xmlns:p14="http://schemas.microsoft.com/office/powerpoint/2010/main">
-        <p14:section name="도입" id="{a49caea9-14a3-f3bb-01f8-62adb1b51531}">
+        <p14:section name="도입" id="{7b88f194-4b0f-f504-2992-be2858721ad9}">
           <p14:sldIdLst>
             <p14:sldId id="256"/>
             <p14:sldId id="257"/>
           </p14:sldIdLst>
         </p14:section>
-        <p14:section name="개념" id="{42885b4a-c5da-54ce-b024-8d519d03a98e}">
+        <p14:section name="개념" id="{3b173110-f5e6-c9d9-a6a2-6b5dc2bc5de5}">
           <p14:sldIdLst>
             <p14:sldId id="258"/>
             <p14:sldId id="259"/>
             <p14:sldId id="260"/>
           </p14:sldIdLst>
         </p14:section>
-        <p14:section name="연습" id="{f7d09b69-2a7a-4c88-dc4e-8ed898309a21}">
+        <p14:section name="연습" id="{1df06f97-91d9-dd9d-cee7-79bc78e5f7da}">
           <p14:sldIdLst>
             <p14:sldId id="261"/>
             <p14:sldId id="262"/>
             <p14:sldId id="263"/>
           </p14:sldIdLst>
         </p14:section>
-        <p14:section name="확인" id="{a5ed00b7-171f-ad5a-de4e-ea3c555ec7d4}">
+        <p14:section name="확인" id="{70a97658-b26f-aa08-8f2e-40f26523fb8c}">
           <p14:sldIdLst>
             <p14:sldId id="264"/>
             <p14:sldId id="265"/>
             <p14:sldId id="266"/>
           </p14:sldIdLst>
         </p14:section>
-        <p14:section name="정리" id="{9d9fa166-26ca-d6ce-5ccd-57a4576bf7ae}">
+        <p14:section name="정리" id="{17440f09-6285-0500-fccf-4a9c5188b8f0}">
           <p14:sldIdLst>
             <p14:sldId id="267"/>
           </p14:sldIdLst>
         </p14:section>
-        <p14:section name="보충" id="{ca204461-69a0-9552-d4f7-1422659f7da6}">
+        <p14:section name="보충" id="{25182dac-16b2-8645-6182-39f5fff69be7}">
           <p14:sldIdLst>
             <p14:sldId id="268"/>
           </p14:sldIdLst>
